--- a/PowerOps_Presentasi_Inovasi.pptx
+++ b/PowerOps_Presentasi_Inovasi.pptx
@@ -317,7 +317,7 @@
           <a:p>
             <a:fld id="{5BCAD085-E8A6-8845-BD4E-CB4CCA059FC4}" type="datetimeFigureOut">
               <a:rPr lang="en-US" smtClean="0"/>
-              <a:t>4/24/2026</a:t>
+              <a:t>5/6/2026</a:t>
             </a:fld>
             <a:endParaRPr lang="en-US"/>
           </a:p>
@@ -487,7 +487,7 @@
           <a:p>
             <a:fld id="{5BCAD085-E8A6-8845-BD4E-CB4CCA059FC4}" type="datetimeFigureOut">
               <a:rPr lang="en-US" smtClean="0"/>
-              <a:t>4/24/2026</a:t>
+              <a:t>5/6/2026</a:t>
             </a:fld>
             <a:endParaRPr lang="en-US"/>
           </a:p>
@@ -667,7 +667,7 @@
           <a:p>
             <a:fld id="{5BCAD085-E8A6-8845-BD4E-CB4CCA059FC4}" type="datetimeFigureOut">
               <a:rPr lang="en-US" smtClean="0"/>
-              <a:t>4/24/2026</a:t>
+              <a:t>5/6/2026</a:t>
             </a:fld>
             <a:endParaRPr lang="en-US"/>
           </a:p>
@@ -837,7 +837,7 @@
           <a:p>
             <a:fld id="{5BCAD085-E8A6-8845-BD4E-CB4CCA059FC4}" type="datetimeFigureOut">
               <a:rPr lang="en-US" smtClean="0"/>
-              <a:t>4/24/2026</a:t>
+              <a:t>5/6/2026</a:t>
             </a:fld>
             <a:endParaRPr lang="en-US"/>
           </a:p>
@@ -1083,7 +1083,7 @@
           <a:p>
             <a:fld id="{5BCAD085-E8A6-8845-BD4E-CB4CCA059FC4}" type="datetimeFigureOut">
               <a:rPr lang="en-US" smtClean="0"/>
-              <a:t>4/24/2026</a:t>
+              <a:t>5/6/2026</a:t>
             </a:fld>
             <a:endParaRPr lang="en-US"/>
           </a:p>
@@ -1371,7 +1371,7 @@
           <a:p>
             <a:fld id="{5BCAD085-E8A6-8845-BD4E-CB4CCA059FC4}" type="datetimeFigureOut">
               <a:rPr lang="en-US" smtClean="0"/>
-              <a:t>4/24/2026</a:t>
+              <a:t>5/6/2026</a:t>
             </a:fld>
             <a:endParaRPr lang="en-US"/>
           </a:p>
@@ -1793,7 +1793,7 @@
           <a:p>
             <a:fld id="{5BCAD085-E8A6-8845-BD4E-CB4CCA059FC4}" type="datetimeFigureOut">
               <a:rPr lang="en-US" smtClean="0"/>
-              <a:t>4/24/2026</a:t>
+              <a:t>5/6/2026</a:t>
             </a:fld>
             <a:endParaRPr lang="en-US"/>
           </a:p>
@@ -1911,7 +1911,7 @@
           <a:p>
             <a:fld id="{5BCAD085-E8A6-8845-BD4E-CB4CCA059FC4}" type="datetimeFigureOut">
               <a:rPr lang="en-US" smtClean="0"/>
-              <a:t>4/24/2026</a:t>
+              <a:t>5/6/2026</a:t>
             </a:fld>
             <a:endParaRPr lang="en-US"/>
           </a:p>
@@ -2006,7 +2006,7 @@
           <a:p>
             <a:fld id="{5BCAD085-E8A6-8845-BD4E-CB4CCA059FC4}" type="datetimeFigureOut">
               <a:rPr lang="en-US" smtClean="0"/>
-              <a:t>4/24/2026</a:t>
+              <a:t>5/6/2026</a:t>
             </a:fld>
             <a:endParaRPr lang="en-US"/>
           </a:p>
@@ -2283,7 +2283,7 @@
           <a:p>
             <a:fld id="{5BCAD085-E8A6-8845-BD4E-CB4CCA059FC4}" type="datetimeFigureOut">
               <a:rPr lang="en-US" smtClean="0"/>
-              <a:t>4/24/2026</a:t>
+              <a:t>5/6/2026</a:t>
             </a:fld>
             <a:endParaRPr lang="en-US"/>
           </a:p>
@@ -2536,7 +2536,7 @@
           <a:p>
             <a:fld id="{5BCAD085-E8A6-8845-BD4E-CB4CCA059FC4}" type="datetimeFigureOut">
               <a:rPr lang="en-US" smtClean="0"/>
-              <a:t>4/24/2026</a:t>
+              <a:t>5/6/2026</a:t>
             </a:fld>
             <a:endParaRPr lang="en-US"/>
           </a:p>
@@ -2749,7 +2749,7 @@
           <a:p>
             <a:fld id="{5BCAD085-E8A6-8845-BD4E-CB4CCA059FC4}" type="datetimeFigureOut">
               <a:rPr lang="en-US" smtClean="0"/>
-              <a:t>4/24/2026</a:t>
+              <a:t>5/6/2026</a:t>
             </a:fld>
             <a:endParaRPr lang="en-US"/>
           </a:p>
@@ -3707,53 +3707,6 @@
       </p:sp>
       <p:sp>
         <p:nvSpPr>
-          <p:cNvPr id="14" name="TextBox 13"/>
-          <p:cNvSpPr txBox="1"/>
-          <p:nvPr/>
-        </p:nvSpPr>
-        <p:spPr>
-          <a:xfrm>
-            <a:off x="1645920" y="5335592"/>
-            <a:ext cx="8869680" cy="255455"/>
-          </a:xfrm>
-          <a:prstGeom prst="rect">
-            <a:avLst/>
-          </a:prstGeom>
-          <a:noFill/>
-        </p:spPr>
-        <p:txBody>
-          <a:bodyPr wrap="square" lIns="45720" tIns="27432" rIns="45720" bIns="27432" anchor="t">
-            <a:spAutoFit/>
-          </a:bodyPr>
-          <a:lstStyle/>
-          <a:p>
-            <a:pPr algn="ctr"/>
-            <a:r>
-              <a:rPr sz="1300" b="0" dirty="0" smtClean="0">
-                <a:latin typeface="Calibri"/>
-              </a:rPr>
-              <a:t>ALIFAHI BATULLAHI N. </a:t>
-            </a:r>
-            <a:r>
-              <a:rPr lang="id-ID" sz="1300" b="0" dirty="0" smtClean="0">
-                <a:latin typeface="Calibri"/>
-              </a:rPr>
-              <a:t>–</a:t>
-            </a:r>
-            <a:r>
-              <a:rPr sz="1300" b="0" dirty="0" smtClean="0">
-                <a:latin typeface="Calibri"/>
-              </a:rPr>
-              <a:t> UTILITAS BATUBARA</a:t>
-            </a:r>
-            <a:endParaRPr sz="1300" b="0" dirty="0">
-              <a:latin typeface="Calibri"/>
-            </a:endParaRPr>
-          </a:p>
-        </p:txBody>
-      </p:sp>
-      <p:sp>
-        <p:nvSpPr>
           <p:cNvPr id="15" name="TextBox 14"/>
           <p:cNvSpPr txBox="1"/>
           <p:nvPr/>
@@ -7999,12 +7952,6 @@
               </a:rPr>
               <a:t>2</a:t>
             </a:r>
-            <a:endParaRPr sz="4400" b="1" dirty="0">
-              <a:solidFill>
-                <a:srgbClr val="1B5E20"/>
-              </a:solidFill>
-              <a:latin typeface="Calibri"/>
-            </a:endParaRPr>
           </a:p>
         </p:txBody>
       </p:sp>
@@ -14733,13 +14680,7 @@
               <a:rPr sz="2000" b="1" u="sng" dirty="0" err="1" smtClean="0">
                 <a:latin typeface="Calibri"/>
               </a:rPr>
-              <a:t>T</a:t>
-            </a:r>
-            <a:r>
-              <a:rPr sz="2000" b="1" u="sng" dirty="0" err="1" smtClean="0">
-                <a:latin typeface="Calibri"/>
-              </a:rPr>
-              <a:t>idak</a:t>
+              <a:t>Tidak</a:t>
             </a:r>
             <a:r>
               <a:rPr sz="2000" b="1" u="sng" dirty="0" smtClean="0">
@@ -15770,16 +15711,7 @@
                 </a:solidFill>
                 <a:latin typeface="Calibri"/>
               </a:rPr>
-              <a:t>A</a:t>
-            </a:r>
-            <a:r>
-              <a:rPr lang="id-ID" sz="2400" b="1" dirty="0" smtClean="0">
-                <a:solidFill>
-                  <a:sysClr val="windowText" lastClr="000000"/>
-                </a:solidFill>
-                <a:latin typeface="Calibri"/>
-              </a:rPr>
-              <a:t>plikasi Web Terpadu untuk Seluruh Workflow Operasi UBB</a:t>
+              <a:t>Aplikasi Web Terpadu untuk Seluruh Workflow Operasi UBB</a:t>
             </a:r>
             <a:endParaRPr lang="id-ID" sz="2400" b="1" dirty="0">
               <a:solidFill>
@@ -21069,11 +21001,6 @@
               </a:rPr>
               <a:t> (CCR)</a:t>
             </a:r>
-            <a:endParaRPr lang="en-US" sz="2800" b="1" dirty="0">
-              <a:solidFill>
-                <a:srgbClr val="1B5E20"/>
-              </a:solidFill>
-            </a:endParaRPr>
           </a:p>
         </p:txBody>
       </p:sp>
@@ -21823,7 +21750,6 @@
               <a:rPr lang="id-ID" sz="1300" dirty="0"/>
               <a:t>level berubah → UI otomatis update</a:t>
             </a:r>
-            <a:endParaRPr lang="id-ID" sz="1300" dirty="0"/>
           </a:p>
         </p:txBody>
       </p:sp>
@@ -22200,11 +22126,6 @@
               </a:rPr>
               <a:t> Digital per Shift</a:t>
             </a:r>
-            <a:endParaRPr lang="en-US" sz="2800" b="1" dirty="0">
-              <a:solidFill>
-                <a:srgbClr val="1B5E20"/>
-              </a:solidFill>
-            </a:endParaRPr>
           </a:p>
         </p:txBody>
       </p:sp>
@@ -22967,7 +22888,6 @@
               <a:rPr lang="id-ID" sz="1400" dirty="0"/>
               <a:t>laporan lama tetap dapat diakses</a:t>
             </a:r>
-            <a:endParaRPr lang="id-ID" sz="1400" dirty="0"/>
           </a:p>
         </p:txBody>
       </p:sp>
@@ -23307,11 +23227,6 @@
               </a:rPr>
               <a:t>— Laporan Harian (LHUBB)</a:t>
             </a:r>
-            <a:endParaRPr lang="id-ID" sz="2800" b="1" dirty="0">
-              <a:solidFill>
-                <a:srgbClr val="1B5E20"/>
-              </a:solidFill>
-            </a:endParaRPr>
           </a:p>
         </p:txBody>
       </p:sp>
@@ -24074,7 +23989,6 @@
               <a:rPr lang="id-ID" sz="1500" dirty="0"/>
               <a:t>semua laporan harian bisa ditelusuri</a:t>
             </a:r>
-            <a:endParaRPr lang="id-ID" sz="1500" dirty="0"/>
           </a:p>
         </p:txBody>
       </p:sp>
@@ -24172,11 +24086,6 @@
               </a:rPr>
               <a:t>review, bukan entry ulang</a:t>
             </a:r>
-            <a:endParaRPr lang="id-ID" b="1" dirty="0">
-              <a:solidFill>
-                <a:srgbClr val="FFFFFF"/>
-              </a:solidFill>
-            </a:endParaRPr>
           </a:p>
         </p:txBody>
       </p:sp>
@@ -24435,11 +24344,6 @@
               </a:rPr>
               <a:t>— Critical + Maintenance Terintegrasi</a:t>
             </a:r>
-            <a:endParaRPr lang="id-ID" sz="2800" b="1" dirty="0">
-              <a:solidFill>
-                <a:srgbClr val="1B5E20"/>
-              </a:solidFill>
-            </a:endParaRPr>
           </a:p>
         </p:txBody>
       </p:sp>
@@ -25202,7 +25106,6 @@
               <a:rPr lang="id-ID" sz="1400" dirty="0"/>
               <a:t>perencanaan preventif/modifikasi terjadwal</a:t>
             </a:r>
-            <a:endParaRPr lang="id-ID" sz="1400" dirty="0"/>
           </a:p>
         </p:txBody>
       </p:sp>
